--- a/Module 2 topic 2/Topic2-Assessment.pptx
+++ b/Module 2 topic 2/Topic2-Assessment.pptx
@@ -1639,6 +1639,40 @@
           </a:p>
         </p:txBody>
       </p:sp>
+      <p:sp>
+        <p:nvSpPr>
+          <p:cNvPr id="8" name="Slide Number 8"/>
+          <p:cNvSpPr txBox="1"/>
+          <p:nvPr/>
+        </p:nvSpPr>
+        <p:spPr>
+          <a:xfrm>
+            <a:off x="11277295" y="6611112"/>
+            <a:ext cx="685800" cy="201168"/>
+          </a:xfrm>
+          <a:prstGeom prst="rect">
+            <a:avLst/>
+          </a:prstGeom>
+          <a:noFill/>
+        </p:spPr>
+        <p:txBody>
+          <a:bodyPr wrap="none" lIns="0" tIns="0" rIns="0" bIns="0" anchor="b">
+            <a:noAutofit/>
+          </a:bodyPr>
+          <a:lstStyle/>
+          <a:p>
+            <a:pPr algn="r"/>
+            <a:fld id="{5C1A6E0B-3B1F-4D5E-9C7A-2F4B8D6E1A90}" type="slidenum">
+              <a:rPr lang="en-US" sz="1200" dirty="0">
+                <a:solidFill>
+                  <a:srgbClr val="5F6272"/>
+                </a:solidFill>
+              </a:rPr>
+              <a:t>1</a:t>
+            </a:fld>
+          </a:p>
+        </p:txBody>
+      </p:sp>
     </p:spTree>
   </p:cSld>
   <p:clrMapOvr>
@@ -1928,6 +1962,40 @@
           </a:p>
         </p:txBody>
       </p:sp>
+      <p:sp>
+        <p:nvSpPr>
+          <p:cNvPr id="6" name="Slide Number 6"/>
+          <p:cNvSpPr txBox="1"/>
+          <p:nvPr/>
+        </p:nvSpPr>
+        <p:spPr>
+          <a:xfrm>
+            <a:off x="11277295" y="6611112"/>
+            <a:ext cx="685800" cy="201168"/>
+          </a:xfrm>
+          <a:prstGeom prst="rect">
+            <a:avLst/>
+          </a:prstGeom>
+          <a:noFill/>
+        </p:spPr>
+        <p:txBody>
+          <a:bodyPr wrap="none" lIns="0" tIns="0" rIns="0" bIns="0" anchor="b">
+            <a:noAutofit/>
+          </a:bodyPr>
+          <a:lstStyle/>
+          <a:p>
+            <a:pPr algn="r"/>
+            <a:fld id="{5C1A6E0B-3B1F-4D5E-9C7A-2F4B8D6E1A90}" type="slidenum">
+              <a:rPr lang="en-US" sz="1200" dirty="0">
+                <a:solidFill>
+                  <a:srgbClr val="5F6272"/>
+                </a:solidFill>
+              </a:rPr>
+              <a:t>10</a:t>
+            </a:fld>
+          </a:p>
+        </p:txBody>
+      </p:sp>
     </p:spTree>
   </p:cSld>
   <p:clrMapOvr>
@@ -2468,6 +2536,40 @@
           </a:p>
         </p:txBody>
       </p:sp>
+      <p:sp>
+        <p:nvSpPr>
+          <p:cNvPr id="10" name="Slide Number 10"/>
+          <p:cNvSpPr txBox="1"/>
+          <p:nvPr/>
+        </p:nvSpPr>
+        <p:spPr>
+          <a:xfrm>
+            <a:off x="11277295" y="6611112"/>
+            <a:ext cx="685800" cy="201168"/>
+          </a:xfrm>
+          <a:prstGeom prst="rect">
+            <a:avLst/>
+          </a:prstGeom>
+          <a:noFill/>
+        </p:spPr>
+        <p:txBody>
+          <a:bodyPr wrap="none" lIns="0" tIns="0" rIns="0" bIns="0" anchor="b">
+            <a:noAutofit/>
+          </a:bodyPr>
+          <a:lstStyle/>
+          <a:p>
+            <a:pPr algn="r"/>
+            <a:fld id="{5C1A6E0B-3B1F-4D5E-9C7A-2F4B8D6E1A90}" type="slidenum">
+              <a:rPr lang="en-US" sz="1200" dirty="0">
+                <a:solidFill>
+                  <a:srgbClr val="5F6272"/>
+                </a:solidFill>
+              </a:rPr>
+              <a:t>11</a:t>
+            </a:fld>
+          </a:p>
+        </p:txBody>
+      </p:sp>
     </p:spTree>
   </p:cSld>
   <p:clrMapOvr>
@@ -3397,6 +3499,40 @@
           </a:p>
         </p:txBody>
       </p:sp>
+      <p:sp>
+        <p:nvSpPr>
+          <p:cNvPr id="19" name="Slide Number 19"/>
+          <p:cNvSpPr txBox="1"/>
+          <p:nvPr/>
+        </p:nvSpPr>
+        <p:spPr>
+          <a:xfrm>
+            <a:off x="11277295" y="6611112"/>
+            <a:ext cx="685800" cy="201168"/>
+          </a:xfrm>
+          <a:prstGeom prst="rect">
+            <a:avLst/>
+          </a:prstGeom>
+          <a:noFill/>
+        </p:spPr>
+        <p:txBody>
+          <a:bodyPr wrap="none" lIns="0" tIns="0" rIns="0" bIns="0" anchor="b">
+            <a:noAutofit/>
+          </a:bodyPr>
+          <a:lstStyle/>
+          <a:p>
+            <a:pPr algn="r"/>
+            <a:fld id="{5C1A6E0B-3B1F-4D5E-9C7A-2F4B8D6E1A90}" type="slidenum">
+              <a:rPr lang="en-US" sz="1200" dirty="0">
+                <a:solidFill>
+                  <a:srgbClr val="5F6272"/>
+                </a:solidFill>
+              </a:rPr>
+              <a:t>12</a:t>
+            </a:fld>
+          </a:p>
+        </p:txBody>
+      </p:sp>
     </p:spTree>
   </p:cSld>
   <p:clrMapOvr>
@@ -4326,6 +4462,40 @@
           </a:p>
         </p:txBody>
       </p:sp>
+      <p:sp>
+        <p:nvSpPr>
+          <p:cNvPr id="19" name="Slide Number 19"/>
+          <p:cNvSpPr txBox="1"/>
+          <p:nvPr/>
+        </p:nvSpPr>
+        <p:spPr>
+          <a:xfrm>
+            <a:off x="11277295" y="6611112"/>
+            <a:ext cx="685800" cy="201168"/>
+          </a:xfrm>
+          <a:prstGeom prst="rect">
+            <a:avLst/>
+          </a:prstGeom>
+          <a:noFill/>
+        </p:spPr>
+        <p:txBody>
+          <a:bodyPr wrap="none" lIns="0" tIns="0" rIns="0" bIns="0" anchor="b">
+            <a:noAutofit/>
+          </a:bodyPr>
+          <a:lstStyle/>
+          <a:p>
+            <a:pPr algn="r"/>
+            <a:fld id="{5C1A6E0B-3B1F-4D5E-9C7A-2F4B8D6E1A90}" type="slidenum">
+              <a:rPr lang="en-US" sz="1200" dirty="0">
+                <a:solidFill>
+                  <a:srgbClr val="5F6272"/>
+                </a:solidFill>
+              </a:rPr>
+              <a:t>13</a:t>
+            </a:fld>
+          </a:p>
+        </p:txBody>
+      </p:sp>
     </p:spTree>
   </p:cSld>
   <p:clrMapOvr>
@@ -6236,6 +6406,40 @@
           </a:p>
         </p:txBody>
       </p:sp>
+      <p:sp>
+        <p:nvSpPr>
+          <p:cNvPr id="50" name="Slide Number 50"/>
+          <p:cNvSpPr txBox="1"/>
+          <p:nvPr/>
+        </p:nvSpPr>
+        <p:spPr>
+          <a:xfrm>
+            <a:off x="11277295" y="6611112"/>
+            <a:ext cx="685800" cy="201168"/>
+          </a:xfrm>
+          <a:prstGeom prst="rect">
+            <a:avLst/>
+          </a:prstGeom>
+          <a:noFill/>
+        </p:spPr>
+        <p:txBody>
+          <a:bodyPr wrap="none" lIns="0" tIns="0" rIns="0" bIns="0" anchor="b">
+            <a:noAutofit/>
+          </a:bodyPr>
+          <a:lstStyle/>
+          <a:p>
+            <a:pPr algn="r"/>
+            <a:fld id="{5C1A6E0B-3B1F-4D5E-9C7A-2F4B8D6E1A90}" type="slidenum">
+              <a:rPr lang="en-US" sz="1200" dirty="0">
+                <a:solidFill>
+                  <a:srgbClr val="5F6272"/>
+                </a:solidFill>
+              </a:rPr>
+              <a:t>14</a:t>
+            </a:fld>
+          </a:p>
+        </p:txBody>
+      </p:sp>
     </p:spTree>
   </p:cSld>
   <p:clrMapOvr>
@@ -6936,6 +7140,40 @@
           </a:p>
         </p:txBody>
       </p:sp>
+      <p:sp>
+        <p:nvSpPr>
+          <p:cNvPr id="10" name="Slide Number 10"/>
+          <p:cNvSpPr txBox="1"/>
+          <p:nvPr/>
+        </p:nvSpPr>
+        <p:spPr>
+          <a:xfrm>
+            <a:off x="11277295" y="6611112"/>
+            <a:ext cx="685800" cy="201168"/>
+          </a:xfrm>
+          <a:prstGeom prst="rect">
+            <a:avLst/>
+          </a:prstGeom>
+          <a:noFill/>
+        </p:spPr>
+        <p:txBody>
+          <a:bodyPr wrap="none" lIns="0" tIns="0" rIns="0" bIns="0" anchor="b">
+            <a:noAutofit/>
+          </a:bodyPr>
+          <a:lstStyle/>
+          <a:p>
+            <a:pPr algn="r"/>
+            <a:fld id="{5C1A6E0B-3B1F-4D5E-9C7A-2F4B8D6E1A90}" type="slidenum">
+              <a:rPr lang="en-US" sz="1200" dirty="0">
+                <a:solidFill>
+                  <a:srgbClr val="5F6272"/>
+                </a:solidFill>
+              </a:rPr>
+              <a:t>15</a:t>
+            </a:fld>
+          </a:p>
+        </p:txBody>
+      </p:sp>
     </p:spTree>
   </p:cSld>
   <p:clrMapOvr>
@@ -7288,6 +7526,40 @@
           </a:p>
         </p:txBody>
       </p:sp>
+      <p:sp>
+        <p:nvSpPr>
+          <p:cNvPr id="8" name="Slide Number 8"/>
+          <p:cNvSpPr txBox="1"/>
+          <p:nvPr/>
+        </p:nvSpPr>
+        <p:spPr>
+          <a:xfrm>
+            <a:off x="11277295" y="6611112"/>
+            <a:ext cx="685800" cy="201168"/>
+          </a:xfrm>
+          <a:prstGeom prst="rect">
+            <a:avLst/>
+          </a:prstGeom>
+          <a:noFill/>
+        </p:spPr>
+        <p:txBody>
+          <a:bodyPr wrap="none" lIns="0" tIns="0" rIns="0" bIns="0" anchor="b">
+            <a:noAutofit/>
+          </a:bodyPr>
+          <a:lstStyle/>
+          <a:p>
+            <a:pPr algn="r"/>
+            <a:fld id="{5C1A6E0B-3B1F-4D5E-9C7A-2F4B8D6E1A90}" type="slidenum">
+              <a:rPr lang="en-US" sz="1200" dirty="0">
+                <a:solidFill>
+                  <a:srgbClr val="5F6272"/>
+                </a:solidFill>
+              </a:rPr>
+              <a:t>16</a:t>
+            </a:fld>
+          </a:p>
+        </p:txBody>
+      </p:sp>
     </p:spTree>
   </p:cSld>
   <p:clrMapOvr>
@@ -7888,6 +8160,40 @@
           </a:p>
         </p:txBody>
       </p:sp>
+      <p:sp>
+        <p:nvSpPr>
+          <p:cNvPr id="10" name="Slide Number 10"/>
+          <p:cNvSpPr txBox="1"/>
+          <p:nvPr/>
+        </p:nvSpPr>
+        <p:spPr>
+          <a:xfrm>
+            <a:off x="11277295" y="6611112"/>
+            <a:ext cx="685800" cy="201168"/>
+          </a:xfrm>
+          <a:prstGeom prst="rect">
+            <a:avLst/>
+          </a:prstGeom>
+          <a:noFill/>
+        </p:spPr>
+        <p:txBody>
+          <a:bodyPr wrap="none" lIns="0" tIns="0" rIns="0" bIns="0" anchor="b">
+            <a:noAutofit/>
+          </a:bodyPr>
+          <a:lstStyle/>
+          <a:p>
+            <a:pPr algn="r"/>
+            <a:fld id="{5C1A6E0B-3B1F-4D5E-9C7A-2F4B8D6E1A90}" type="slidenum">
+              <a:rPr lang="en-US" sz="1200" dirty="0">
+                <a:solidFill>
+                  <a:srgbClr val="5F6272"/>
+                </a:solidFill>
+              </a:rPr>
+              <a:t>2</a:t>
+            </a:fld>
+          </a:p>
+        </p:txBody>
+      </p:sp>
     </p:spTree>
   </p:cSld>
   <p:clrMapOvr>
@@ -8654,6 +8960,40 @@
           </a:p>
         </p:txBody>
       </p:sp>
+      <p:sp>
+        <p:nvSpPr>
+          <p:cNvPr id="9" name="Slide Number 9"/>
+          <p:cNvSpPr txBox="1"/>
+          <p:nvPr/>
+        </p:nvSpPr>
+        <p:spPr>
+          <a:xfrm>
+            <a:off x="11277295" y="6611112"/>
+            <a:ext cx="685800" cy="201168"/>
+          </a:xfrm>
+          <a:prstGeom prst="rect">
+            <a:avLst/>
+          </a:prstGeom>
+          <a:noFill/>
+        </p:spPr>
+        <p:txBody>
+          <a:bodyPr wrap="none" lIns="0" tIns="0" rIns="0" bIns="0" anchor="b">
+            <a:noAutofit/>
+          </a:bodyPr>
+          <a:lstStyle/>
+          <a:p>
+            <a:pPr algn="r"/>
+            <a:fld id="{5C1A6E0B-3B1F-4D5E-9C7A-2F4B8D6E1A90}" type="slidenum">
+              <a:rPr lang="en-US" sz="1200" dirty="0">
+                <a:solidFill>
+                  <a:srgbClr val="5F6272"/>
+                </a:solidFill>
+              </a:rPr>
+              <a:t>3</a:t>
+            </a:fld>
+          </a:p>
+        </p:txBody>
+      </p:sp>
     </p:spTree>
   </p:cSld>
   <p:clrMapOvr>
@@ -9207,6 +9547,40 @@
           </a:p>
         </p:txBody>
       </p:sp>
+      <p:sp>
+        <p:nvSpPr>
+          <p:cNvPr id="7" name="Slide Number 7"/>
+          <p:cNvSpPr txBox="1"/>
+          <p:nvPr/>
+        </p:nvSpPr>
+        <p:spPr>
+          <a:xfrm>
+            <a:off x="11277295" y="6611112"/>
+            <a:ext cx="685800" cy="201168"/>
+          </a:xfrm>
+          <a:prstGeom prst="rect">
+            <a:avLst/>
+          </a:prstGeom>
+          <a:noFill/>
+        </p:spPr>
+        <p:txBody>
+          <a:bodyPr wrap="none" lIns="0" tIns="0" rIns="0" bIns="0" anchor="b">
+            <a:noAutofit/>
+          </a:bodyPr>
+          <a:lstStyle/>
+          <a:p>
+            <a:pPr algn="r"/>
+            <a:fld id="{5C1A6E0B-3B1F-4D5E-9C7A-2F4B8D6E1A90}" type="slidenum">
+              <a:rPr lang="en-US" sz="1200" dirty="0">
+                <a:solidFill>
+                  <a:srgbClr val="5F6272"/>
+                </a:solidFill>
+              </a:rPr>
+              <a:t>4</a:t>
+            </a:fld>
+          </a:p>
+        </p:txBody>
+      </p:sp>
     </p:spTree>
   </p:cSld>
   <p:clrMapOvr>
@@ -11538,6 +11912,40 @@
           </a:p>
         </p:txBody>
       </p:sp>
+      <p:sp>
+        <p:nvSpPr>
+          <p:cNvPr id="58" name="Slide Number 58"/>
+          <p:cNvSpPr txBox="1"/>
+          <p:nvPr/>
+        </p:nvSpPr>
+        <p:spPr>
+          <a:xfrm>
+            <a:off x="11277295" y="6611112"/>
+            <a:ext cx="685800" cy="201168"/>
+          </a:xfrm>
+          <a:prstGeom prst="rect">
+            <a:avLst/>
+          </a:prstGeom>
+          <a:noFill/>
+        </p:spPr>
+        <p:txBody>
+          <a:bodyPr wrap="none" lIns="0" tIns="0" rIns="0" bIns="0" anchor="b">
+            <a:noAutofit/>
+          </a:bodyPr>
+          <a:lstStyle/>
+          <a:p>
+            <a:pPr algn="r"/>
+            <a:fld id="{5C1A6E0B-3B1F-4D5E-9C7A-2F4B8D6E1A90}" type="slidenum">
+              <a:rPr lang="en-US" sz="1200" dirty="0">
+                <a:solidFill>
+                  <a:srgbClr val="5F6272"/>
+                </a:solidFill>
+              </a:rPr>
+              <a:t>5</a:t>
+            </a:fld>
+          </a:p>
+        </p:txBody>
+      </p:sp>
     </p:spTree>
   </p:cSld>
   <p:clrMapOvr>
@@ -11971,6 +12379,40 @@
           </a:p>
         </p:txBody>
       </p:sp>
+      <p:sp>
+        <p:nvSpPr>
+          <p:cNvPr id="7" name="Slide Number 7"/>
+          <p:cNvSpPr txBox="1"/>
+          <p:nvPr/>
+        </p:nvSpPr>
+        <p:spPr>
+          <a:xfrm>
+            <a:off x="11277295" y="6611112"/>
+            <a:ext cx="685800" cy="201168"/>
+          </a:xfrm>
+          <a:prstGeom prst="rect">
+            <a:avLst/>
+          </a:prstGeom>
+          <a:noFill/>
+        </p:spPr>
+        <p:txBody>
+          <a:bodyPr wrap="none" lIns="0" tIns="0" rIns="0" bIns="0" anchor="b">
+            <a:noAutofit/>
+          </a:bodyPr>
+          <a:lstStyle/>
+          <a:p>
+            <a:pPr algn="r"/>
+            <a:fld id="{5C1A6E0B-3B1F-4D5E-9C7A-2F4B8D6E1A90}" type="slidenum">
+              <a:rPr lang="en-US" sz="1200" dirty="0">
+                <a:solidFill>
+                  <a:srgbClr val="5F6272"/>
+                </a:solidFill>
+              </a:rPr>
+              <a:t>6</a:t>
+            </a:fld>
+          </a:p>
+        </p:txBody>
+      </p:sp>
     </p:spTree>
   </p:cSld>
   <p:clrMapOvr>
@@ -12751,6 +13193,40 @@
           </a:p>
         </p:txBody>
       </p:sp>
+      <p:sp>
+        <p:nvSpPr>
+          <p:cNvPr id="10" name="Slide Number 10"/>
+          <p:cNvSpPr txBox="1"/>
+          <p:nvPr/>
+        </p:nvSpPr>
+        <p:spPr>
+          <a:xfrm>
+            <a:off x="11277295" y="6611112"/>
+            <a:ext cx="685800" cy="201168"/>
+          </a:xfrm>
+          <a:prstGeom prst="rect">
+            <a:avLst/>
+          </a:prstGeom>
+          <a:noFill/>
+        </p:spPr>
+        <p:txBody>
+          <a:bodyPr wrap="none" lIns="0" tIns="0" rIns="0" bIns="0" anchor="b">
+            <a:noAutofit/>
+          </a:bodyPr>
+          <a:lstStyle/>
+          <a:p>
+            <a:pPr algn="r"/>
+            <a:fld id="{5C1A6E0B-3B1F-4D5E-9C7A-2F4B8D6E1A90}" type="slidenum">
+              <a:rPr lang="en-US" sz="1200" dirty="0">
+                <a:solidFill>
+                  <a:srgbClr val="5F6272"/>
+                </a:solidFill>
+              </a:rPr>
+              <a:t>7</a:t>
+            </a:fld>
+          </a:p>
+        </p:txBody>
+      </p:sp>
     </p:spTree>
   </p:cSld>
   <p:clrMapOvr>
@@ -13064,6 +13540,40 @@
           </a:p>
         </p:txBody>
       </p:sp>
+      <p:sp>
+        <p:nvSpPr>
+          <p:cNvPr id="7" name="Slide Number 7"/>
+          <p:cNvSpPr txBox="1"/>
+          <p:nvPr/>
+        </p:nvSpPr>
+        <p:spPr>
+          <a:xfrm>
+            <a:off x="11277295" y="6611112"/>
+            <a:ext cx="685800" cy="201168"/>
+          </a:xfrm>
+          <a:prstGeom prst="rect">
+            <a:avLst/>
+          </a:prstGeom>
+          <a:noFill/>
+        </p:spPr>
+        <p:txBody>
+          <a:bodyPr wrap="none" lIns="0" tIns="0" rIns="0" bIns="0" anchor="b">
+            <a:noAutofit/>
+          </a:bodyPr>
+          <a:lstStyle/>
+          <a:p>
+            <a:pPr algn="r"/>
+            <a:fld id="{5C1A6E0B-3B1F-4D5E-9C7A-2F4B8D6E1A90}" type="slidenum">
+              <a:rPr lang="en-US" sz="1200" dirty="0">
+                <a:solidFill>
+                  <a:srgbClr val="5F6272"/>
+                </a:solidFill>
+              </a:rPr>
+              <a:t>8</a:t>
+            </a:fld>
+          </a:p>
+        </p:txBody>
+      </p:sp>
     </p:spTree>
   </p:cSld>
   <p:clrMapOvr>
@@ -13697,6 +14207,40 @@
               <a:t xml:space="preserve">Topic 2 Assessment</a:t>
             </a:r>
             <a:endParaRPr lang="en-US" sz="1125" dirty="0"/>
+          </a:p>
+        </p:txBody>
+      </p:sp>
+      <p:sp>
+        <p:nvSpPr>
+          <p:cNvPr id="9" name="Slide Number 9"/>
+          <p:cNvSpPr txBox="1"/>
+          <p:nvPr/>
+        </p:nvSpPr>
+        <p:spPr>
+          <a:xfrm>
+            <a:off x="11277295" y="6611112"/>
+            <a:ext cx="685800" cy="201168"/>
+          </a:xfrm>
+          <a:prstGeom prst="rect">
+            <a:avLst/>
+          </a:prstGeom>
+          <a:noFill/>
+        </p:spPr>
+        <p:txBody>
+          <a:bodyPr wrap="none" lIns="0" tIns="0" rIns="0" bIns="0" anchor="b">
+            <a:noAutofit/>
+          </a:bodyPr>
+          <a:lstStyle/>
+          <a:p>
+            <a:pPr algn="r"/>
+            <a:fld id="{5C1A6E0B-3B1F-4D5E-9C7A-2F4B8D6E1A90}" type="slidenum">
+              <a:rPr lang="en-US" sz="1200" dirty="0">
+                <a:solidFill>
+                  <a:srgbClr val="5F6272"/>
+                </a:solidFill>
+              </a:rPr>
+              <a:t>9</a:t>
+            </a:fld>
           </a:p>
         </p:txBody>
       </p:sp>

--- a/Module 2 topic 2/Topic2-Assessment.pptx
+++ b/Module 2 topic 2/Topic2-Assessment.pptx
@@ -173,7 +173,7 @@
           <a:p>
             <a:r>
               <a:rPr lang="en-US" dirty="0"/>
-              <a:t>End of Topic 2 Assessment, Day 13 (Nov 9) on the 150-day calendar. Original items: the publisher's Assessments book has no Topic 2 test, so these 14 items cover the TE Assessment Summary TEKS (A.2A, A.2C, A.2E, A.2F, A.2G, A.3C, A.3E): Q1-4 Lesson 1, Q5-6 Lesson 2, Q7-10 Lesson 3, Q11-14 Lesson 4.</a:t>
+              <a:t>End of Topic 2 Assessment, Day 10 (Tue Nov 3, the district test date); review Nov 2, retakes Nov 4. Original items: the publisher's Assessments book has no Topic 2 test, so these 14 items cover the TE Assessment Summary TEKS (A.2A, A.2C, A.2E, A.2F, A.2G, A.3C, A.3E): Q1-4 Lesson 1, Q5-6 Lesson 2, Q7-10 Lesson 3, Q11-14 Lesson 4.</a:t>
             </a:r>
           </a:p>
         </p:txBody>
